--- a/Desafios_SQL.pptx
+++ b/Desafios_SQL.pptx
@@ -26,6 +26,19 @@
     <p:sldId id="274" r:id="rId20"/>
     <p:sldId id="275" r:id="rId21"/>
     <p:sldId id="276" r:id="rId22"/>
+    <p:sldId id="277" r:id="rId23"/>
+    <p:sldId id="278" r:id="rId24"/>
+    <p:sldId id="279" r:id="rId25"/>
+    <p:sldId id="280" r:id="rId26"/>
+    <p:sldId id="281" r:id="rId27"/>
+    <p:sldId id="284" r:id="rId28"/>
+    <p:sldId id="283" r:id="rId29"/>
+    <p:sldId id="285" r:id="rId30"/>
+    <p:sldId id="286" r:id="rId31"/>
+    <p:sldId id="287" r:id="rId32"/>
+    <p:sldId id="282" r:id="rId33"/>
+    <p:sldId id="288" r:id="rId34"/>
+    <p:sldId id="289" r:id="rId35"/>
   </p:sldIdLst>
   <p:sldSz cx="12192000" cy="6858000"/>
   <p:notesSz cx="6858000" cy="9144000"/>
@@ -124,6 +137,11 @@
       </a:defRPr>
     </a:lvl9pPr>
   </p:defaultTextStyle>
+  <p:extLst>
+    <p:ext uri="{EFAFB233-063F-42B5-8137-9DF3F51BA10A}">
+      <p15:sldGuideLst xmlns:p15="http://schemas.microsoft.com/office/powerpoint/2012/main"/>
+    </p:ext>
+  </p:extLst>
 </p:presentation>
 </file>
 
@@ -274,7 +292,7 @@
           <a:p>
             <a:fld id="{E26A88CC-856A-4B50-8CF1-70A4FB309B71}" type="datetimeFigureOut">
               <a:rPr lang="pt-BR" smtClean="0"/>
-              <a:t>17/06/2026</a:t>
+              <a:t>23/06/2026</a:t>
             </a:fld>
             <a:endParaRPr lang="pt-BR"/>
           </a:p>
@@ -472,7 +490,7 @@
           <a:p>
             <a:fld id="{E26A88CC-856A-4B50-8CF1-70A4FB309B71}" type="datetimeFigureOut">
               <a:rPr lang="pt-BR" smtClean="0"/>
-              <a:t>17/06/2026</a:t>
+              <a:t>23/06/2026</a:t>
             </a:fld>
             <a:endParaRPr lang="pt-BR"/>
           </a:p>
@@ -680,7 +698,7 @@
           <a:p>
             <a:fld id="{E26A88CC-856A-4B50-8CF1-70A4FB309B71}" type="datetimeFigureOut">
               <a:rPr lang="pt-BR" smtClean="0"/>
-              <a:t>17/06/2026</a:t>
+              <a:t>23/06/2026</a:t>
             </a:fld>
             <a:endParaRPr lang="pt-BR"/>
           </a:p>
@@ -878,7 +896,7 @@
           <a:p>
             <a:fld id="{E26A88CC-856A-4B50-8CF1-70A4FB309B71}" type="datetimeFigureOut">
               <a:rPr lang="pt-BR" smtClean="0"/>
-              <a:t>17/06/2026</a:t>
+              <a:t>23/06/2026</a:t>
             </a:fld>
             <a:endParaRPr lang="pt-BR"/>
           </a:p>
@@ -1153,7 +1171,7 @@
           <a:p>
             <a:fld id="{E26A88CC-856A-4B50-8CF1-70A4FB309B71}" type="datetimeFigureOut">
               <a:rPr lang="pt-BR" smtClean="0"/>
-              <a:t>17/06/2026</a:t>
+              <a:t>23/06/2026</a:t>
             </a:fld>
             <a:endParaRPr lang="pt-BR"/>
           </a:p>
@@ -1418,7 +1436,7 @@
           <a:p>
             <a:fld id="{E26A88CC-856A-4B50-8CF1-70A4FB309B71}" type="datetimeFigureOut">
               <a:rPr lang="pt-BR" smtClean="0"/>
-              <a:t>17/06/2026</a:t>
+              <a:t>23/06/2026</a:t>
             </a:fld>
             <a:endParaRPr lang="pt-BR"/>
           </a:p>
@@ -1830,7 +1848,7 @@
           <a:p>
             <a:fld id="{E26A88CC-856A-4B50-8CF1-70A4FB309B71}" type="datetimeFigureOut">
               <a:rPr lang="pt-BR" smtClean="0"/>
-              <a:t>17/06/2026</a:t>
+              <a:t>23/06/2026</a:t>
             </a:fld>
             <a:endParaRPr lang="pt-BR"/>
           </a:p>
@@ -1971,7 +1989,7 @@
           <a:p>
             <a:fld id="{E26A88CC-856A-4B50-8CF1-70A4FB309B71}" type="datetimeFigureOut">
               <a:rPr lang="pt-BR" smtClean="0"/>
-              <a:t>17/06/2026</a:t>
+              <a:t>23/06/2026</a:t>
             </a:fld>
             <a:endParaRPr lang="pt-BR"/>
           </a:p>
@@ -2084,7 +2102,7 @@
           <a:p>
             <a:fld id="{E26A88CC-856A-4B50-8CF1-70A4FB309B71}" type="datetimeFigureOut">
               <a:rPr lang="pt-BR" smtClean="0"/>
-              <a:t>17/06/2026</a:t>
+              <a:t>23/06/2026</a:t>
             </a:fld>
             <a:endParaRPr lang="pt-BR"/>
           </a:p>
@@ -2395,7 +2413,7 @@
           <a:p>
             <a:fld id="{E26A88CC-856A-4B50-8CF1-70A4FB309B71}" type="datetimeFigureOut">
               <a:rPr lang="pt-BR" smtClean="0"/>
-              <a:t>17/06/2026</a:t>
+              <a:t>23/06/2026</a:t>
             </a:fld>
             <a:endParaRPr lang="pt-BR"/>
           </a:p>
@@ -2683,7 +2701,7 @@
           <a:p>
             <a:fld id="{E26A88CC-856A-4B50-8CF1-70A4FB309B71}" type="datetimeFigureOut">
               <a:rPr lang="pt-BR" smtClean="0"/>
-              <a:t>17/06/2026</a:t>
+              <a:t>23/06/2026</a:t>
             </a:fld>
             <a:endParaRPr lang="pt-BR"/>
           </a:p>
@@ -2924,7 +2942,7 @@
           <a:p>
             <a:fld id="{E26A88CC-856A-4B50-8CF1-70A4FB309B71}" type="datetimeFigureOut">
               <a:rPr lang="pt-BR" smtClean="0"/>
-              <a:t>17/06/2026</a:t>
+              <a:t>23/06/2026</a:t>
             </a:fld>
             <a:endParaRPr lang="pt-BR"/>
           </a:p>
@@ -4594,6 +4612,1440 @@
 </p:sld>
 </file>
 
+<file path=ppt/slides/slide22.xml><?xml version="1.0" encoding="utf-8"?>
+<p:sld xmlns:a="http://schemas.openxmlformats.org/drawingml/2006/main" xmlns:r="http://schemas.openxmlformats.org/officeDocument/2006/relationships" xmlns:p="http://schemas.openxmlformats.org/presentationml/2006/main">
+  <p:cSld>
+    <p:spTree>
+      <p:nvGrpSpPr>
+        <p:cNvPr id="1" name=""/>
+        <p:cNvGrpSpPr/>
+        <p:nvPr/>
+      </p:nvGrpSpPr>
+      <p:grpSpPr>
+        <a:xfrm>
+          <a:off x="0" y="0"/>
+          <a:ext cx="0" cy="0"/>
+          <a:chOff x="0" y="0"/>
+          <a:chExt cx="0" cy="0"/>
+        </a:xfrm>
+      </p:grpSpPr>
+      <p:sp>
+        <p:nvSpPr>
+          <p:cNvPr id="2" name="Título 1">
+            <a:extLst>
+              <a:ext uri="{FF2B5EF4-FFF2-40B4-BE49-F238E27FC236}">
+                <a16:creationId xmlns:a16="http://schemas.microsoft.com/office/drawing/2014/main" id="{9C7FD886-D913-4FCF-A922-C463E37B6EAB}"/>
+              </a:ext>
+            </a:extLst>
+          </p:cNvPr>
+          <p:cNvSpPr>
+            <a:spLocks noGrp="1"/>
+          </p:cNvSpPr>
+          <p:nvPr>
+            <p:ph type="title"/>
+          </p:nvPr>
+        </p:nvSpPr>
+        <p:spPr/>
+        <p:txBody>
+          <a:bodyPr/>
+          <a:lstStyle/>
+          <a:p>
+            <a:r>
+              <a:rPr lang="pt-BR" b="1" dirty="0"/>
+              <a:t>SQL Avançado</a:t>
+            </a:r>
+          </a:p>
+        </p:txBody>
+      </p:sp>
+      <p:sp>
+        <p:nvSpPr>
+          <p:cNvPr id="3" name="Espaço Reservado para Conteúdo 2">
+            <a:extLst>
+              <a:ext uri="{FF2B5EF4-FFF2-40B4-BE49-F238E27FC236}">
+                <a16:creationId xmlns:a16="http://schemas.microsoft.com/office/drawing/2014/main" id="{7C186539-3899-459C-9B14-9EA3E15DB318}"/>
+              </a:ext>
+            </a:extLst>
+          </p:cNvPr>
+          <p:cNvSpPr>
+            <a:spLocks noGrp="1"/>
+          </p:cNvSpPr>
+          <p:nvPr>
+            <p:ph idx="1"/>
+          </p:nvPr>
+        </p:nvSpPr>
+        <p:spPr/>
+        <p:txBody>
+          <a:bodyPr/>
+          <a:lstStyle/>
+          <a:p>
+            <a:r>
+              <a:rPr lang="pt-BR" dirty="0"/>
+              <a:t>JOINS</a:t>
+            </a:r>
+          </a:p>
+          <a:p>
+            <a:r>
+              <a:rPr lang="pt-BR" dirty="0"/>
+              <a:t>VIEWS</a:t>
+            </a:r>
+          </a:p>
+          <a:p>
+            <a:r>
+              <a:rPr lang="pt-BR" b="1" dirty="0"/>
+              <a:t>PROCEDURES</a:t>
+            </a:r>
+          </a:p>
+          <a:p>
+            <a:r>
+              <a:rPr lang="pt-BR" b="1" dirty="0"/>
+              <a:t>TRIGGERS</a:t>
+            </a:r>
+          </a:p>
+          <a:p>
+            <a:r>
+              <a:rPr lang="pt-BR" dirty="0"/>
+              <a:t>FUNCTIONS</a:t>
+            </a:r>
+          </a:p>
+        </p:txBody>
+      </p:sp>
+    </p:spTree>
+    <p:extLst>
+      <p:ext uri="{BB962C8B-B14F-4D97-AF65-F5344CB8AC3E}">
+        <p14:creationId xmlns:p14="http://schemas.microsoft.com/office/powerpoint/2010/main" val="4118493561"/>
+      </p:ext>
+    </p:extLst>
+  </p:cSld>
+  <p:clrMapOvr>
+    <a:masterClrMapping/>
+  </p:clrMapOvr>
+</p:sld>
+</file>
+
+<file path=ppt/slides/slide23.xml><?xml version="1.0" encoding="utf-8"?>
+<p:sld xmlns:a="http://schemas.openxmlformats.org/drawingml/2006/main" xmlns:r="http://schemas.openxmlformats.org/officeDocument/2006/relationships" xmlns:p="http://schemas.openxmlformats.org/presentationml/2006/main">
+  <p:cSld>
+    <p:spTree>
+      <p:nvGrpSpPr>
+        <p:cNvPr id="1" name=""/>
+        <p:cNvGrpSpPr/>
+        <p:nvPr/>
+      </p:nvGrpSpPr>
+      <p:grpSpPr>
+        <a:xfrm>
+          <a:off x="0" y="0"/>
+          <a:ext cx="0" cy="0"/>
+          <a:chOff x="0" y="0"/>
+          <a:chExt cx="0" cy="0"/>
+        </a:xfrm>
+      </p:grpSpPr>
+      <p:sp>
+        <p:nvSpPr>
+          <p:cNvPr id="2" name="Título 1">
+            <a:extLst>
+              <a:ext uri="{FF2B5EF4-FFF2-40B4-BE49-F238E27FC236}">
+                <a16:creationId xmlns:a16="http://schemas.microsoft.com/office/drawing/2014/main" id="{96C2AE91-F615-4623-AC61-2898CA7111B4}"/>
+              </a:ext>
+            </a:extLst>
+          </p:cNvPr>
+          <p:cNvSpPr>
+            <a:spLocks noGrp="1"/>
+          </p:cNvSpPr>
+          <p:nvPr>
+            <p:ph type="title"/>
+          </p:nvPr>
+        </p:nvSpPr>
+        <p:spPr/>
+        <p:txBody>
+          <a:bodyPr/>
+          <a:lstStyle/>
+          <a:p>
+            <a:r>
+              <a:rPr lang="pt-BR" dirty="0"/>
+              <a:t>VIEWS</a:t>
+            </a:r>
+          </a:p>
+        </p:txBody>
+      </p:sp>
+      <p:sp>
+        <p:nvSpPr>
+          <p:cNvPr id="3" name="Espaço Reservado para Conteúdo 2">
+            <a:extLst>
+              <a:ext uri="{FF2B5EF4-FFF2-40B4-BE49-F238E27FC236}">
+                <a16:creationId xmlns:a16="http://schemas.microsoft.com/office/drawing/2014/main" id="{2F30364B-DA8A-4286-B8B3-83F2F19DED6A}"/>
+              </a:ext>
+            </a:extLst>
+          </p:cNvPr>
+          <p:cNvSpPr>
+            <a:spLocks noGrp="1"/>
+          </p:cNvSpPr>
+          <p:nvPr>
+            <p:ph idx="1"/>
+          </p:nvPr>
+        </p:nvSpPr>
+        <p:spPr/>
+        <p:txBody>
+          <a:bodyPr/>
+          <a:lstStyle/>
+          <a:p>
+            <a:r>
+              <a:rPr lang="pt-BR" dirty="0"/>
+              <a:t>Visualizações de tabelas temporárias</a:t>
+            </a:r>
+          </a:p>
+          <a:p>
+            <a:r>
+              <a:rPr lang="pt-BR" b="1" dirty="0"/>
+              <a:t>SELECT FROM tabela1 </a:t>
+            </a:r>
+          </a:p>
+          <a:p>
+            <a:r>
+              <a:rPr lang="pt-BR" b="1" dirty="0"/>
+              <a:t>                   JOIN tabela2 </a:t>
+            </a:r>
+          </a:p>
+          <a:p>
+            <a:r>
+              <a:rPr lang="pt-BR" b="1" dirty="0"/>
+              <a:t>                   JOIN tabela3 </a:t>
+            </a:r>
+          </a:p>
+          <a:p>
+            <a:r>
+              <a:rPr lang="pt-BR" b="1" dirty="0"/>
+              <a:t>                   JOIN tabela4 WHERE idfk_tabela1 = id.tabela1 </a:t>
+            </a:r>
+          </a:p>
+        </p:txBody>
+      </p:sp>
+    </p:spTree>
+    <p:extLst>
+      <p:ext uri="{BB962C8B-B14F-4D97-AF65-F5344CB8AC3E}">
+        <p14:creationId xmlns:p14="http://schemas.microsoft.com/office/powerpoint/2010/main" val="795733149"/>
+      </p:ext>
+    </p:extLst>
+  </p:cSld>
+  <p:clrMapOvr>
+    <a:masterClrMapping/>
+  </p:clrMapOvr>
+</p:sld>
+</file>
+
+<file path=ppt/slides/slide24.xml><?xml version="1.0" encoding="utf-8"?>
+<p:sld xmlns:a="http://schemas.openxmlformats.org/drawingml/2006/main" xmlns:r="http://schemas.openxmlformats.org/officeDocument/2006/relationships" xmlns:p="http://schemas.openxmlformats.org/presentationml/2006/main">
+  <p:cSld>
+    <p:spTree>
+      <p:nvGrpSpPr>
+        <p:cNvPr id="1" name=""/>
+        <p:cNvGrpSpPr/>
+        <p:nvPr/>
+      </p:nvGrpSpPr>
+      <p:grpSpPr>
+        <a:xfrm>
+          <a:off x="0" y="0"/>
+          <a:ext cx="0" cy="0"/>
+          <a:chOff x="0" y="0"/>
+          <a:chExt cx="0" cy="0"/>
+        </a:xfrm>
+      </p:grpSpPr>
+      <p:pic>
+        <p:nvPicPr>
+          <p:cNvPr id="2" name="Imagem 1">
+            <a:extLst>
+              <a:ext uri="{FF2B5EF4-FFF2-40B4-BE49-F238E27FC236}">
+                <a16:creationId xmlns:a16="http://schemas.microsoft.com/office/drawing/2014/main" id="{0D56B56F-FC4B-40D4-9FAE-F4FA46CF6316}"/>
+              </a:ext>
+            </a:extLst>
+          </p:cNvPr>
+          <p:cNvPicPr>
+            <a:picLocks noChangeAspect="1"/>
+          </p:cNvPicPr>
+          <p:nvPr/>
+        </p:nvPicPr>
+        <p:blipFill>
+          <a:blip r:embed="rId2"/>
+          <a:stretch>
+            <a:fillRect/>
+          </a:stretch>
+        </p:blipFill>
+        <p:spPr>
+          <a:xfrm>
+            <a:off x="159391" y="221501"/>
+            <a:ext cx="7399090" cy="6575941"/>
+          </a:xfrm>
+          <a:prstGeom prst="rect">
+            <a:avLst/>
+          </a:prstGeom>
+        </p:spPr>
+      </p:pic>
+    </p:spTree>
+    <p:extLst>
+      <p:ext uri="{BB962C8B-B14F-4D97-AF65-F5344CB8AC3E}">
+        <p14:creationId xmlns:p14="http://schemas.microsoft.com/office/powerpoint/2010/main" val="534342077"/>
+      </p:ext>
+    </p:extLst>
+  </p:cSld>
+  <p:clrMapOvr>
+    <a:masterClrMapping/>
+  </p:clrMapOvr>
+</p:sld>
+</file>
+
+<file path=ppt/slides/slide25.xml><?xml version="1.0" encoding="utf-8"?>
+<p:sld xmlns:a="http://schemas.openxmlformats.org/drawingml/2006/main" xmlns:r="http://schemas.openxmlformats.org/officeDocument/2006/relationships" xmlns:p="http://schemas.openxmlformats.org/presentationml/2006/main">
+  <p:cSld>
+    <p:spTree>
+      <p:nvGrpSpPr>
+        <p:cNvPr id="1" name=""/>
+        <p:cNvGrpSpPr/>
+        <p:nvPr/>
+      </p:nvGrpSpPr>
+      <p:grpSpPr>
+        <a:xfrm>
+          <a:off x="0" y="0"/>
+          <a:ext cx="0" cy="0"/>
+          <a:chOff x="0" y="0"/>
+          <a:chExt cx="0" cy="0"/>
+        </a:xfrm>
+      </p:grpSpPr>
+      <p:pic>
+        <p:nvPicPr>
+          <p:cNvPr id="2" name="Imagem 1">
+            <a:extLst>
+              <a:ext uri="{FF2B5EF4-FFF2-40B4-BE49-F238E27FC236}">
+                <a16:creationId xmlns:a16="http://schemas.microsoft.com/office/drawing/2014/main" id="{2FA99630-AEA8-4B5A-942E-276965493101}"/>
+              </a:ext>
+            </a:extLst>
+          </p:cNvPr>
+          <p:cNvPicPr>
+            <a:picLocks noChangeAspect="1"/>
+          </p:cNvPicPr>
+          <p:nvPr/>
+        </p:nvPicPr>
+        <p:blipFill>
+          <a:blip r:embed="rId2"/>
+          <a:stretch>
+            <a:fillRect/>
+          </a:stretch>
+        </p:blipFill>
+        <p:spPr>
+          <a:xfrm>
+            <a:off x="-83192" y="-186656"/>
+            <a:ext cx="7641998" cy="3657601"/>
+          </a:xfrm>
+          <a:prstGeom prst="rect">
+            <a:avLst/>
+          </a:prstGeom>
+        </p:spPr>
+      </p:pic>
+      <p:pic>
+        <p:nvPicPr>
+          <p:cNvPr id="3" name="Imagem 2">
+            <a:extLst>
+              <a:ext uri="{FF2B5EF4-FFF2-40B4-BE49-F238E27FC236}">
+                <a16:creationId xmlns:a16="http://schemas.microsoft.com/office/drawing/2014/main" id="{B4E2BAD0-A348-4F05-9C3A-00EF5F5D9222}"/>
+              </a:ext>
+            </a:extLst>
+          </p:cNvPr>
+          <p:cNvPicPr>
+            <a:picLocks noChangeAspect="1"/>
+          </p:cNvPicPr>
+          <p:nvPr/>
+        </p:nvPicPr>
+        <p:blipFill>
+          <a:blip r:embed="rId3"/>
+          <a:stretch>
+            <a:fillRect/>
+          </a:stretch>
+        </p:blipFill>
+        <p:spPr>
+          <a:xfrm>
+            <a:off x="0" y="3429000"/>
+            <a:ext cx="12192000" cy="2545102"/>
+          </a:xfrm>
+          <a:prstGeom prst="rect">
+            <a:avLst/>
+          </a:prstGeom>
+        </p:spPr>
+      </p:pic>
+      <p:sp>
+        <p:nvSpPr>
+          <p:cNvPr id="5" name="Forma Livre: Forma 4">
+            <a:extLst>
+              <a:ext uri="{FF2B5EF4-FFF2-40B4-BE49-F238E27FC236}">
+                <a16:creationId xmlns:a16="http://schemas.microsoft.com/office/drawing/2014/main" id="{96A32070-F888-4CC3-A07A-CCA065FBF347}"/>
+              </a:ext>
+            </a:extLst>
+          </p:cNvPr>
+          <p:cNvSpPr/>
+          <p:nvPr/>
+        </p:nvSpPr>
+        <p:spPr>
+          <a:xfrm>
+            <a:off x="7600426" y="3094660"/>
+            <a:ext cx="864391" cy="126712"/>
+          </a:xfrm>
+          <a:custGeom>
+            <a:avLst/>
+            <a:gdLst>
+              <a:gd name="connsiteX0" fmla="*/ 0 w 864391"/>
+              <a:gd name="connsiteY0" fmla="*/ 26045 h 126712"/>
+              <a:gd name="connsiteX1" fmla="*/ 67112 w 864391"/>
+              <a:gd name="connsiteY1" fmla="*/ 42823 h 126712"/>
+              <a:gd name="connsiteX2" fmla="*/ 92279 w 864391"/>
+              <a:gd name="connsiteY2" fmla="*/ 59601 h 126712"/>
+              <a:gd name="connsiteX3" fmla="*/ 151002 w 864391"/>
+              <a:gd name="connsiteY3" fmla="*/ 84768 h 126712"/>
+              <a:gd name="connsiteX4" fmla="*/ 176168 w 864391"/>
+              <a:gd name="connsiteY4" fmla="*/ 101546 h 126712"/>
+              <a:gd name="connsiteX5" fmla="*/ 218113 w 864391"/>
+              <a:gd name="connsiteY5" fmla="*/ 109934 h 126712"/>
+              <a:gd name="connsiteX6" fmla="*/ 243280 w 864391"/>
+              <a:gd name="connsiteY6" fmla="*/ 118323 h 126712"/>
+              <a:gd name="connsiteX7" fmla="*/ 377504 w 864391"/>
+              <a:gd name="connsiteY7" fmla="*/ 126712 h 126712"/>
+              <a:gd name="connsiteX8" fmla="*/ 637563 w 864391"/>
+              <a:gd name="connsiteY8" fmla="*/ 118323 h 126712"/>
+              <a:gd name="connsiteX9" fmla="*/ 662730 w 864391"/>
+              <a:gd name="connsiteY9" fmla="*/ 109934 h 126712"/>
+              <a:gd name="connsiteX10" fmla="*/ 687897 w 864391"/>
+              <a:gd name="connsiteY10" fmla="*/ 93157 h 126712"/>
+              <a:gd name="connsiteX11" fmla="*/ 713064 w 864391"/>
+              <a:gd name="connsiteY11" fmla="*/ 84768 h 126712"/>
+              <a:gd name="connsiteX12" fmla="*/ 738231 w 864391"/>
+              <a:gd name="connsiteY12" fmla="*/ 67990 h 126712"/>
+              <a:gd name="connsiteX13" fmla="*/ 763398 w 864391"/>
+              <a:gd name="connsiteY13" fmla="*/ 59601 h 126712"/>
+              <a:gd name="connsiteX14" fmla="*/ 813732 w 864391"/>
+              <a:gd name="connsiteY14" fmla="*/ 26045 h 126712"/>
+              <a:gd name="connsiteX15" fmla="*/ 864066 w 864391"/>
+              <a:gd name="connsiteY15" fmla="*/ 878 h 126712"/>
+              <a:gd name="connsiteX16" fmla="*/ 855677 w 864391"/>
+              <a:gd name="connsiteY16" fmla="*/ 878 h 126712"/>
+            </a:gdLst>
+            <a:ahLst/>
+            <a:cxnLst>
+              <a:cxn ang="0">
+                <a:pos x="connsiteX0" y="connsiteY0"/>
+              </a:cxn>
+              <a:cxn ang="0">
+                <a:pos x="connsiteX1" y="connsiteY1"/>
+              </a:cxn>
+              <a:cxn ang="0">
+                <a:pos x="connsiteX2" y="connsiteY2"/>
+              </a:cxn>
+              <a:cxn ang="0">
+                <a:pos x="connsiteX3" y="connsiteY3"/>
+              </a:cxn>
+              <a:cxn ang="0">
+                <a:pos x="connsiteX4" y="connsiteY4"/>
+              </a:cxn>
+              <a:cxn ang="0">
+                <a:pos x="connsiteX5" y="connsiteY5"/>
+              </a:cxn>
+              <a:cxn ang="0">
+                <a:pos x="connsiteX6" y="connsiteY6"/>
+              </a:cxn>
+              <a:cxn ang="0">
+                <a:pos x="connsiteX7" y="connsiteY7"/>
+              </a:cxn>
+              <a:cxn ang="0">
+                <a:pos x="connsiteX8" y="connsiteY8"/>
+              </a:cxn>
+              <a:cxn ang="0">
+                <a:pos x="connsiteX9" y="connsiteY9"/>
+              </a:cxn>
+              <a:cxn ang="0">
+                <a:pos x="connsiteX10" y="connsiteY10"/>
+              </a:cxn>
+              <a:cxn ang="0">
+                <a:pos x="connsiteX11" y="connsiteY11"/>
+              </a:cxn>
+              <a:cxn ang="0">
+                <a:pos x="connsiteX12" y="connsiteY12"/>
+              </a:cxn>
+              <a:cxn ang="0">
+                <a:pos x="connsiteX13" y="connsiteY13"/>
+              </a:cxn>
+              <a:cxn ang="0">
+                <a:pos x="connsiteX14" y="connsiteY14"/>
+              </a:cxn>
+              <a:cxn ang="0">
+                <a:pos x="connsiteX15" y="connsiteY15"/>
+              </a:cxn>
+              <a:cxn ang="0">
+                <a:pos x="connsiteX16" y="connsiteY16"/>
+              </a:cxn>
+            </a:cxnLst>
+            <a:rect l="l" t="t" r="r" b="b"/>
+            <a:pathLst>
+              <a:path w="864391" h="126712">
+                <a:moveTo>
+                  <a:pt x="0" y="26045"/>
+                </a:moveTo>
+                <a:cubicBezTo>
+                  <a:pt x="15954" y="29236"/>
+                  <a:pt x="49915" y="34224"/>
+                  <a:pt x="67112" y="42823"/>
+                </a:cubicBezTo>
+                <a:cubicBezTo>
+                  <a:pt x="76130" y="47332"/>
+                  <a:pt x="83261" y="55092"/>
+                  <a:pt x="92279" y="59601"/>
+                </a:cubicBezTo>
+                <a:cubicBezTo>
+                  <a:pt x="186383" y="106653"/>
+                  <a:pt x="28823" y="14950"/>
+                  <a:pt x="151002" y="84768"/>
+                </a:cubicBezTo>
+                <a:cubicBezTo>
+                  <a:pt x="159756" y="89770"/>
+                  <a:pt x="166728" y="98006"/>
+                  <a:pt x="176168" y="101546"/>
+                </a:cubicBezTo>
+                <a:cubicBezTo>
+                  <a:pt x="189519" y="106552"/>
+                  <a:pt x="204280" y="106476"/>
+                  <a:pt x="218113" y="109934"/>
+                </a:cubicBezTo>
+                <a:cubicBezTo>
+                  <a:pt x="226692" y="112079"/>
+                  <a:pt x="234486" y="117397"/>
+                  <a:pt x="243280" y="118323"/>
+                </a:cubicBezTo>
+                <a:cubicBezTo>
+                  <a:pt x="287862" y="123016"/>
+                  <a:pt x="332763" y="123916"/>
+                  <a:pt x="377504" y="126712"/>
+                </a:cubicBezTo>
+                <a:cubicBezTo>
+                  <a:pt x="464190" y="123916"/>
+                  <a:pt x="550981" y="123416"/>
+                  <a:pt x="637563" y="118323"/>
+                </a:cubicBezTo>
+                <a:cubicBezTo>
+                  <a:pt x="646391" y="117804"/>
+                  <a:pt x="654821" y="113888"/>
+                  <a:pt x="662730" y="109934"/>
+                </a:cubicBezTo>
+                <a:cubicBezTo>
+                  <a:pt x="671748" y="105425"/>
+                  <a:pt x="678879" y="97666"/>
+                  <a:pt x="687897" y="93157"/>
+                </a:cubicBezTo>
+                <a:cubicBezTo>
+                  <a:pt x="695806" y="89203"/>
+                  <a:pt x="705155" y="88723"/>
+                  <a:pt x="713064" y="84768"/>
+                </a:cubicBezTo>
+                <a:cubicBezTo>
+                  <a:pt x="722082" y="80259"/>
+                  <a:pt x="729213" y="72499"/>
+                  <a:pt x="738231" y="67990"/>
+                </a:cubicBezTo>
+                <a:cubicBezTo>
+                  <a:pt x="746140" y="64035"/>
+                  <a:pt x="755668" y="63895"/>
+                  <a:pt x="763398" y="59601"/>
+                </a:cubicBezTo>
+                <a:cubicBezTo>
+                  <a:pt x="781025" y="49808"/>
+                  <a:pt x="794602" y="32422"/>
+                  <a:pt x="813732" y="26045"/>
+                </a:cubicBezTo>
+                <a:cubicBezTo>
+                  <a:pt x="834201" y="19222"/>
+                  <a:pt x="847804" y="17140"/>
+                  <a:pt x="864066" y="878"/>
+                </a:cubicBezTo>
+                <a:cubicBezTo>
+                  <a:pt x="866043" y="-1099"/>
+                  <a:pt x="858473" y="878"/>
+                  <a:pt x="855677" y="878"/>
+                </a:cubicBezTo>
+              </a:path>
+            </a:pathLst>
+          </a:custGeom>
+          <a:noFill/>
+        </p:spPr>
+        <p:style>
+          <a:lnRef idx="2">
+            <a:schemeClr val="accent1">
+              <a:shade val="50000"/>
+            </a:schemeClr>
+          </a:lnRef>
+          <a:fillRef idx="1">
+            <a:schemeClr val="accent1"/>
+          </a:fillRef>
+          <a:effectRef idx="0">
+            <a:schemeClr val="accent1"/>
+          </a:effectRef>
+          <a:fontRef idx="minor">
+            <a:schemeClr val="lt1"/>
+          </a:fontRef>
+        </p:style>
+        <p:txBody>
+          <a:bodyPr rtlCol="0" anchor="ctr"/>
+          <a:lstStyle/>
+          <a:p>
+            <a:pPr algn="ctr"/>
+            <a:endParaRPr lang="pt-BR"/>
+          </a:p>
+        </p:txBody>
+      </p:sp>
+      <p:sp>
+        <p:nvSpPr>
+          <p:cNvPr id="6" name="Forma Livre: Forma 5">
+            <a:extLst>
+              <a:ext uri="{FF2B5EF4-FFF2-40B4-BE49-F238E27FC236}">
+                <a16:creationId xmlns:a16="http://schemas.microsoft.com/office/drawing/2014/main" id="{B9968BE9-231F-4430-B6BA-6DB19AD86BA6}"/>
+              </a:ext>
+            </a:extLst>
+          </p:cNvPr>
+          <p:cNvSpPr/>
+          <p:nvPr/>
+        </p:nvSpPr>
+        <p:spPr>
+          <a:xfrm>
+            <a:off x="5818285" y="3263317"/>
+            <a:ext cx="2176423" cy="562063"/>
+          </a:xfrm>
+          <a:custGeom>
+            <a:avLst/>
+            <a:gdLst>
+              <a:gd name="connsiteX0" fmla="*/ 2176423 w 2176423"/>
+              <a:gd name="connsiteY0" fmla="*/ 0 h 562063"/>
+              <a:gd name="connsiteX1" fmla="*/ 2151256 w 2176423"/>
+              <a:gd name="connsiteY1" fmla="*/ 41945 h 562063"/>
+              <a:gd name="connsiteX2" fmla="*/ 2126089 w 2176423"/>
+              <a:gd name="connsiteY2" fmla="*/ 50334 h 562063"/>
+              <a:gd name="connsiteX3" fmla="*/ 2100922 w 2176423"/>
+              <a:gd name="connsiteY3" fmla="*/ 75501 h 562063"/>
+              <a:gd name="connsiteX4" fmla="*/ 2075755 w 2176423"/>
+              <a:gd name="connsiteY4" fmla="*/ 83890 h 562063"/>
+              <a:gd name="connsiteX5" fmla="*/ 2050588 w 2176423"/>
+              <a:gd name="connsiteY5" fmla="*/ 100668 h 562063"/>
+              <a:gd name="connsiteX6" fmla="*/ 1991865 w 2176423"/>
+              <a:gd name="connsiteY6" fmla="*/ 117446 h 562063"/>
+              <a:gd name="connsiteX7" fmla="*/ 960020 w 2176423"/>
+              <a:gd name="connsiteY7" fmla="*/ 125835 h 562063"/>
+              <a:gd name="connsiteX8" fmla="*/ 892908 w 2176423"/>
+              <a:gd name="connsiteY8" fmla="*/ 151002 h 562063"/>
+              <a:gd name="connsiteX9" fmla="*/ 884519 w 2176423"/>
+              <a:gd name="connsiteY9" fmla="*/ 176169 h 562063"/>
+              <a:gd name="connsiteX10" fmla="*/ 909686 w 2176423"/>
+              <a:gd name="connsiteY10" fmla="*/ 226503 h 562063"/>
+              <a:gd name="connsiteX11" fmla="*/ 809018 w 2176423"/>
+              <a:gd name="connsiteY11" fmla="*/ 251670 h 562063"/>
+              <a:gd name="connsiteX12" fmla="*/ 196621 w 2176423"/>
+              <a:gd name="connsiteY12" fmla="*/ 268448 h 562063"/>
+              <a:gd name="connsiteX13" fmla="*/ 87565 w 2176423"/>
+              <a:gd name="connsiteY13" fmla="*/ 285226 h 562063"/>
+              <a:gd name="connsiteX14" fmla="*/ 62398 w 2176423"/>
+              <a:gd name="connsiteY14" fmla="*/ 293615 h 562063"/>
+              <a:gd name="connsiteX15" fmla="*/ 28842 w 2176423"/>
+              <a:gd name="connsiteY15" fmla="*/ 302004 h 562063"/>
+              <a:gd name="connsiteX16" fmla="*/ 3675 w 2176423"/>
+              <a:gd name="connsiteY16" fmla="*/ 327171 h 562063"/>
+              <a:gd name="connsiteX17" fmla="*/ 37231 w 2176423"/>
+              <a:gd name="connsiteY17" fmla="*/ 411061 h 562063"/>
+              <a:gd name="connsiteX18" fmla="*/ 62398 w 2176423"/>
+              <a:gd name="connsiteY18" fmla="*/ 419450 h 562063"/>
+              <a:gd name="connsiteX19" fmla="*/ 87565 w 2176423"/>
+              <a:gd name="connsiteY19" fmla="*/ 469784 h 562063"/>
+              <a:gd name="connsiteX20" fmla="*/ 188232 w 2176423"/>
+              <a:gd name="connsiteY20" fmla="*/ 520118 h 562063"/>
+              <a:gd name="connsiteX21" fmla="*/ 213399 w 2176423"/>
+              <a:gd name="connsiteY21" fmla="*/ 528507 h 562063"/>
+              <a:gd name="connsiteX22" fmla="*/ 280511 w 2176423"/>
+              <a:gd name="connsiteY22" fmla="*/ 536896 h 562063"/>
+              <a:gd name="connsiteX23" fmla="*/ 339234 w 2176423"/>
+              <a:gd name="connsiteY23" fmla="*/ 545285 h 562063"/>
+              <a:gd name="connsiteX24" fmla="*/ 532181 w 2176423"/>
+              <a:gd name="connsiteY24" fmla="*/ 553674 h 562063"/>
+              <a:gd name="connsiteX25" fmla="*/ 783851 w 2176423"/>
+              <a:gd name="connsiteY25" fmla="*/ 562063 h 562063"/>
+              <a:gd name="connsiteX26" fmla="*/ 1203300 w 2176423"/>
+              <a:gd name="connsiteY26" fmla="*/ 553674 h 562063"/>
+              <a:gd name="connsiteX27" fmla="*/ 1572416 w 2176423"/>
+              <a:gd name="connsiteY27" fmla="*/ 536896 h 562063"/>
+              <a:gd name="connsiteX28" fmla="*/ 1614361 w 2176423"/>
+              <a:gd name="connsiteY28" fmla="*/ 528507 h 562063"/>
+              <a:gd name="connsiteX29" fmla="*/ 1673084 w 2176423"/>
+              <a:gd name="connsiteY29" fmla="*/ 511729 h 562063"/>
+              <a:gd name="connsiteX30" fmla="*/ 1706640 w 2176423"/>
+              <a:gd name="connsiteY30" fmla="*/ 494951 h 562063"/>
+              <a:gd name="connsiteX31" fmla="*/ 1765363 w 2176423"/>
+              <a:gd name="connsiteY31" fmla="*/ 478173 h 562063"/>
+              <a:gd name="connsiteX32" fmla="*/ 1790530 w 2176423"/>
+              <a:gd name="connsiteY32" fmla="*/ 453006 h 562063"/>
+              <a:gd name="connsiteX33" fmla="*/ 1782141 w 2176423"/>
+              <a:gd name="connsiteY33" fmla="*/ 419450 h 562063"/>
+              <a:gd name="connsiteX34" fmla="*/ 1740196 w 2176423"/>
+              <a:gd name="connsiteY34" fmla="*/ 343949 h 562063"/>
+              <a:gd name="connsiteX35" fmla="*/ 1715029 w 2176423"/>
+              <a:gd name="connsiteY35" fmla="*/ 335560 h 562063"/>
+              <a:gd name="connsiteX36" fmla="*/ 1664695 w 2176423"/>
+              <a:gd name="connsiteY36" fmla="*/ 302004 h 562063"/>
+              <a:gd name="connsiteX37" fmla="*/ 1555638 w 2176423"/>
+              <a:gd name="connsiteY37" fmla="*/ 276837 h 562063"/>
+              <a:gd name="connsiteX38" fmla="*/ 1438192 w 2176423"/>
+              <a:gd name="connsiteY38" fmla="*/ 251670 h 562063"/>
+              <a:gd name="connsiteX39" fmla="*/ 691572 w 2176423"/>
+              <a:gd name="connsiteY39" fmla="*/ 243281 h 562063"/>
+            </a:gdLst>
+            <a:ahLst/>
+            <a:cxnLst>
+              <a:cxn ang="0">
+                <a:pos x="connsiteX0" y="connsiteY0"/>
+              </a:cxn>
+              <a:cxn ang="0">
+                <a:pos x="connsiteX1" y="connsiteY1"/>
+              </a:cxn>
+              <a:cxn ang="0">
+                <a:pos x="connsiteX2" y="connsiteY2"/>
+              </a:cxn>
+              <a:cxn ang="0">
+                <a:pos x="connsiteX3" y="connsiteY3"/>
+              </a:cxn>
+              <a:cxn ang="0">
+                <a:pos x="connsiteX4" y="connsiteY4"/>
+              </a:cxn>
+              <a:cxn ang="0">
+                <a:pos x="connsiteX5" y="connsiteY5"/>
+              </a:cxn>
+              <a:cxn ang="0">
+                <a:pos x="connsiteX6" y="connsiteY6"/>
+              </a:cxn>
+              <a:cxn ang="0">
+                <a:pos x="connsiteX7" y="connsiteY7"/>
+              </a:cxn>
+              <a:cxn ang="0">
+                <a:pos x="connsiteX8" y="connsiteY8"/>
+              </a:cxn>
+              <a:cxn ang="0">
+                <a:pos x="connsiteX9" y="connsiteY9"/>
+              </a:cxn>
+              <a:cxn ang="0">
+                <a:pos x="connsiteX10" y="connsiteY10"/>
+              </a:cxn>
+              <a:cxn ang="0">
+                <a:pos x="connsiteX11" y="connsiteY11"/>
+              </a:cxn>
+              <a:cxn ang="0">
+                <a:pos x="connsiteX12" y="connsiteY12"/>
+              </a:cxn>
+              <a:cxn ang="0">
+                <a:pos x="connsiteX13" y="connsiteY13"/>
+              </a:cxn>
+              <a:cxn ang="0">
+                <a:pos x="connsiteX14" y="connsiteY14"/>
+              </a:cxn>
+              <a:cxn ang="0">
+                <a:pos x="connsiteX15" y="connsiteY15"/>
+              </a:cxn>
+              <a:cxn ang="0">
+                <a:pos x="connsiteX16" y="connsiteY16"/>
+              </a:cxn>
+              <a:cxn ang="0">
+                <a:pos x="connsiteX17" y="connsiteY17"/>
+              </a:cxn>
+              <a:cxn ang="0">
+                <a:pos x="connsiteX18" y="connsiteY18"/>
+              </a:cxn>
+              <a:cxn ang="0">
+                <a:pos x="connsiteX19" y="connsiteY19"/>
+              </a:cxn>
+              <a:cxn ang="0">
+                <a:pos x="connsiteX20" y="connsiteY20"/>
+              </a:cxn>
+              <a:cxn ang="0">
+                <a:pos x="connsiteX21" y="connsiteY21"/>
+              </a:cxn>
+              <a:cxn ang="0">
+                <a:pos x="connsiteX22" y="connsiteY22"/>
+              </a:cxn>
+              <a:cxn ang="0">
+                <a:pos x="connsiteX23" y="connsiteY23"/>
+              </a:cxn>
+              <a:cxn ang="0">
+                <a:pos x="connsiteX24" y="connsiteY24"/>
+              </a:cxn>
+              <a:cxn ang="0">
+                <a:pos x="connsiteX25" y="connsiteY25"/>
+              </a:cxn>
+              <a:cxn ang="0">
+                <a:pos x="connsiteX26" y="connsiteY26"/>
+              </a:cxn>
+              <a:cxn ang="0">
+                <a:pos x="connsiteX27" y="connsiteY27"/>
+              </a:cxn>
+              <a:cxn ang="0">
+                <a:pos x="connsiteX28" y="connsiteY28"/>
+              </a:cxn>
+              <a:cxn ang="0">
+                <a:pos x="connsiteX29" y="connsiteY29"/>
+              </a:cxn>
+              <a:cxn ang="0">
+                <a:pos x="connsiteX30" y="connsiteY30"/>
+              </a:cxn>
+              <a:cxn ang="0">
+                <a:pos x="connsiteX31" y="connsiteY31"/>
+              </a:cxn>
+              <a:cxn ang="0">
+                <a:pos x="connsiteX32" y="connsiteY32"/>
+              </a:cxn>
+              <a:cxn ang="0">
+                <a:pos x="connsiteX33" y="connsiteY33"/>
+              </a:cxn>
+              <a:cxn ang="0">
+                <a:pos x="connsiteX34" y="connsiteY34"/>
+              </a:cxn>
+              <a:cxn ang="0">
+                <a:pos x="connsiteX35" y="connsiteY35"/>
+              </a:cxn>
+              <a:cxn ang="0">
+                <a:pos x="connsiteX36" y="connsiteY36"/>
+              </a:cxn>
+              <a:cxn ang="0">
+                <a:pos x="connsiteX37" y="connsiteY37"/>
+              </a:cxn>
+              <a:cxn ang="0">
+                <a:pos x="connsiteX38" y="connsiteY38"/>
+              </a:cxn>
+              <a:cxn ang="0">
+                <a:pos x="connsiteX39" y="connsiteY39"/>
+              </a:cxn>
+            </a:cxnLst>
+            <a:rect l="l" t="t" r="r" b="b"/>
+            <a:pathLst>
+              <a:path w="2176423" h="562063">
+                <a:moveTo>
+                  <a:pt x="2176423" y="0"/>
+                </a:moveTo>
+                <a:cubicBezTo>
+                  <a:pt x="2168034" y="13982"/>
+                  <a:pt x="2162786" y="30415"/>
+                  <a:pt x="2151256" y="41945"/>
+                </a:cubicBezTo>
+                <a:cubicBezTo>
+                  <a:pt x="2145003" y="48198"/>
+                  <a:pt x="2133447" y="45429"/>
+                  <a:pt x="2126089" y="50334"/>
+                </a:cubicBezTo>
+                <a:cubicBezTo>
+                  <a:pt x="2116218" y="56915"/>
+                  <a:pt x="2110793" y="68920"/>
+                  <a:pt x="2100922" y="75501"/>
+                </a:cubicBezTo>
+                <a:cubicBezTo>
+                  <a:pt x="2093564" y="80406"/>
+                  <a:pt x="2083664" y="79935"/>
+                  <a:pt x="2075755" y="83890"/>
+                </a:cubicBezTo>
+                <a:cubicBezTo>
+                  <a:pt x="2066737" y="88399"/>
+                  <a:pt x="2059606" y="96159"/>
+                  <a:pt x="2050588" y="100668"/>
+                </a:cubicBezTo>
+                <a:cubicBezTo>
+                  <a:pt x="2042542" y="104691"/>
+                  <a:pt x="1997416" y="117359"/>
+                  <a:pt x="1991865" y="117446"/>
+                </a:cubicBezTo>
+                <a:lnTo>
+                  <a:pt x="960020" y="125835"/>
+                </a:lnTo>
+                <a:cubicBezTo>
+                  <a:pt x="937283" y="130382"/>
+                  <a:pt x="909366" y="130429"/>
+                  <a:pt x="892908" y="151002"/>
+                </a:cubicBezTo>
+                <a:cubicBezTo>
+                  <a:pt x="887384" y="157907"/>
+                  <a:pt x="887315" y="167780"/>
+                  <a:pt x="884519" y="176169"/>
+                </a:cubicBezTo>
+                <a:cubicBezTo>
+                  <a:pt x="885082" y="177013"/>
+                  <a:pt x="916632" y="219557"/>
+                  <a:pt x="909686" y="226503"/>
+                </a:cubicBezTo>
+                <a:cubicBezTo>
+                  <a:pt x="898516" y="237673"/>
+                  <a:pt x="823611" y="250940"/>
+                  <a:pt x="809018" y="251670"/>
+                </a:cubicBezTo>
+                <a:cubicBezTo>
+                  <a:pt x="747985" y="254722"/>
+                  <a:pt x="236672" y="267421"/>
+                  <a:pt x="196621" y="268448"/>
+                </a:cubicBezTo>
+                <a:cubicBezTo>
+                  <a:pt x="112102" y="289578"/>
+                  <a:pt x="232498" y="261070"/>
+                  <a:pt x="87565" y="285226"/>
+                </a:cubicBezTo>
+                <a:cubicBezTo>
+                  <a:pt x="78843" y="286680"/>
+                  <a:pt x="70901" y="291186"/>
+                  <a:pt x="62398" y="293615"/>
+                </a:cubicBezTo>
+                <a:cubicBezTo>
+                  <a:pt x="51312" y="296782"/>
+                  <a:pt x="40027" y="299208"/>
+                  <a:pt x="28842" y="302004"/>
+                </a:cubicBezTo>
+                <a:cubicBezTo>
+                  <a:pt x="20453" y="310393"/>
+                  <a:pt x="5797" y="315499"/>
+                  <a:pt x="3675" y="327171"/>
+                </a:cubicBezTo>
+                <a:cubicBezTo>
+                  <a:pt x="-5646" y="378437"/>
+                  <a:pt x="1785" y="393338"/>
+                  <a:pt x="37231" y="411061"/>
+                </a:cubicBezTo>
+                <a:cubicBezTo>
+                  <a:pt x="45140" y="415016"/>
+                  <a:pt x="54009" y="416654"/>
+                  <a:pt x="62398" y="419450"/>
+                </a:cubicBezTo>
+                <a:cubicBezTo>
+                  <a:pt x="68382" y="437402"/>
+                  <a:pt x="72259" y="456391"/>
+                  <a:pt x="87565" y="469784"/>
+                </a:cubicBezTo>
+                <a:cubicBezTo>
+                  <a:pt x="127595" y="504811"/>
+                  <a:pt x="140711" y="504278"/>
+                  <a:pt x="188232" y="520118"/>
+                </a:cubicBezTo>
+                <a:cubicBezTo>
+                  <a:pt x="196621" y="522914"/>
+                  <a:pt x="204625" y="527410"/>
+                  <a:pt x="213399" y="528507"/>
+                </a:cubicBezTo>
+                <a:lnTo>
+                  <a:pt x="280511" y="536896"/>
+                </a:lnTo>
+                <a:cubicBezTo>
+                  <a:pt x="300111" y="539509"/>
+                  <a:pt x="319505" y="543970"/>
+                  <a:pt x="339234" y="545285"/>
+                </a:cubicBezTo>
+                <a:cubicBezTo>
+                  <a:pt x="403468" y="549567"/>
+                  <a:pt x="467850" y="551246"/>
+                  <a:pt x="532181" y="553674"/>
+                </a:cubicBezTo>
+                <a:lnTo>
+                  <a:pt x="783851" y="562063"/>
+                </a:lnTo>
+                <a:lnTo>
+                  <a:pt x="1203300" y="553674"/>
+                </a:lnTo>
+                <a:cubicBezTo>
+                  <a:pt x="1330978" y="550670"/>
+                  <a:pt x="1449063" y="554518"/>
+                  <a:pt x="1572416" y="536896"/>
+                </a:cubicBezTo>
+                <a:cubicBezTo>
+                  <a:pt x="1586531" y="534880"/>
+                  <a:pt x="1600442" y="531600"/>
+                  <a:pt x="1614361" y="528507"/>
+                </a:cubicBezTo>
+                <a:cubicBezTo>
+                  <a:pt x="1629097" y="525232"/>
+                  <a:pt x="1657993" y="518197"/>
+                  <a:pt x="1673084" y="511729"/>
+                </a:cubicBezTo>
+                <a:cubicBezTo>
+                  <a:pt x="1684578" y="506803"/>
+                  <a:pt x="1695146" y="499877"/>
+                  <a:pt x="1706640" y="494951"/>
+                </a:cubicBezTo>
+                <a:cubicBezTo>
+                  <a:pt x="1723489" y="487730"/>
+                  <a:pt x="1748335" y="482430"/>
+                  <a:pt x="1765363" y="478173"/>
+                </a:cubicBezTo>
+                <a:cubicBezTo>
+                  <a:pt x="1773752" y="469784"/>
+                  <a:pt x="1787271" y="464413"/>
+                  <a:pt x="1790530" y="453006"/>
+                </a:cubicBezTo>
+                <a:cubicBezTo>
+                  <a:pt x="1793697" y="441920"/>
+                  <a:pt x="1785454" y="430493"/>
+                  <a:pt x="1782141" y="419450"/>
+                </a:cubicBezTo>
+                <a:cubicBezTo>
+                  <a:pt x="1771197" y="382971"/>
+                  <a:pt x="1771438" y="364777"/>
+                  <a:pt x="1740196" y="343949"/>
+                </a:cubicBezTo>
+                <a:cubicBezTo>
+                  <a:pt x="1732838" y="339044"/>
+                  <a:pt x="1722759" y="339854"/>
+                  <a:pt x="1715029" y="335560"/>
+                </a:cubicBezTo>
+                <a:cubicBezTo>
+                  <a:pt x="1697402" y="325767"/>
+                  <a:pt x="1684258" y="306895"/>
+                  <a:pt x="1664695" y="302004"/>
+                </a:cubicBezTo>
+                <a:cubicBezTo>
+                  <a:pt x="1500229" y="260887"/>
+                  <a:pt x="1671839" y="302660"/>
+                  <a:pt x="1555638" y="276837"/>
+                </a:cubicBezTo>
+                <a:cubicBezTo>
+                  <a:pt x="1506615" y="265943"/>
+                  <a:pt x="1503215" y="259798"/>
+                  <a:pt x="1438192" y="251670"/>
+                </a:cubicBezTo>
+                <a:cubicBezTo>
+                  <a:pt x="1146326" y="215187"/>
+                  <a:pt x="1393625" y="243281"/>
+                  <a:pt x="691572" y="243281"/>
+                </a:cubicBezTo>
+              </a:path>
+            </a:pathLst>
+          </a:custGeom>
+          <a:noFill/>
+        </p:spPr>
+        <p:style>
+          <a:lnRef idx="2">
+            <a:schemeClr val="accent1">
+              <a:shade val="50000"/>
+            </a:schemeClr>
+          </a:lnRef>
+          <a:fillRef idx="1">
+            <a:schemeClr val="accent1"/>
+          </a:fillRef>
+          <a:effectRef idx="0">
+            <a:schemeClr val="accent1"/>
+          </a:effectRef>
+          <a:fontRef idx="minor">
+            <a:schemeClr val="lt1"/>
+          </a:fontRef>
+        </p:style>
+        <p:txBody>
+          <a:bodyPr rtlCol="0" anchor="ctr"/>
+          <a:lstStyle/>
+          <a:p>
+            <a:pPr algn="ctr"/>
+            <a:endParaRPr lang="pt-BR"/>
+          </a:p>
+        </p:txBody>
+      </p:sp>
+      <p:pic>
+        <p:nvPicPr>
+          <p:cNvPr id="7" name="Imagem 6">
+            <a:extLst>
+              <a:ext uri="{FF2B5EF4-FFF2-40B4-BE49-F238E27FC236}">
+                <a16:creationId xmlns:a16="http://schemas.microsoft.com/office/drawing/2014/main" id="{42B01A3C-20F8-4E0E-B88B-7210A44DDD9C}"/>
+              </a:ext>
+            </a:extLst>
+          </p:cNvPr>
+          <p:cNvPicPr>
+            <a:picLocks noChangeAspect="1"/>
+          </p:cNvPicPr>
+          <p:nvPr/>
+        </p:nvPicPr>
+        <p:blipFill>
+          <a:blip r:embed="rId4"/>
+          <a:stretch>
+            <a:fillRect/>
+          </a:stretch>
+        </p:blipFill>
+        <p:spPr>
+          <a:xfrm>
+            <a:off x="4550001" y="2535729"/>
+            <a:ext cx="7641999" cy="974031"/>
+          </a:xfrm>
+          <a:prstGeom prst="rect">
+            <a:avLst/>
+          </a:prstGeom>
+        </p:spPr>
+      </p:pic>
+    </p:spTree>
+    <p:extLst>
+      <p:ext uri="{BB962C8B-B14F-4D97-AF65-F5344CB8AC3E}">
+        <p14:creationId xmlns:p14="http://schemas.microsoft.com/office/powerpoint/2010/main" val="3201666333"/>
+      </p:ext>
+    </p:extLst>
+  </p:cSld>
+  <p:clrMapOvr>
+    <a:masterClrMapping/>
+  </p:clrMapOvr>
+</p:sld>
+</file>
+
+<file path=ppt/slides/slide26.xml><?xml version="1.0" encoding="utf-8"?>
+<p:sld xmlns:a="http://schemas.openxmlformats.org/drawingml/2006/main" xmlns:r="http://schemas.openxmlformats.org/officeDocument/2006/relationships" xmlns:p="http://schemas.openxmlformats.org/presentationml/2006/main">
+  <p:cSld>
+    <p:spTree>
+      <p:nvGrpSpPr>
+        <p:cNvPr id="1" name=""/>
+        <p:cNvGrpSpPr/>
+        <p:nvPr/>
+      </p:nvGrpSpPr>
+      <p:grpSpPr>
+        <a:xfrm>
+          <a:off x="0" y="0"/>
+          <a:ext cx="0" cy="0"/>
+          <a:chOff x="0" y="0"/>
+          <a:chExt cx="0" cy="0"/>
+        </a:xfrm>
+      </p:grpSpPr>
+      <p:pic>
+        <p:nvPicPr>
+          <p:cNvPr id="2" name="Imagem 1">
+            <a:extLst>
+              <a:ext uri="{FF2B5EF4-FFF2-40B4-BE49-F238E27FC236}">
+                <a16:creationId xmlns:a16="http://schemas.microsoft.com/office/drawing/2014/main" id="{D4803C9F-9578-4141-A601-6F74BF2F65BD}"/>
+              </a:ext>
+            </a:extLst>
+          </p:cNvPr>
+          <p:cNvPicPr>
+            <a:picLocks noChangeAspect="1"/>
+          </p:cNvPicPr>
+          <p:nvPr/>
+        </p:nvPicPr>
+        <p:blipFill>
+          <a:blip r:embed="rId2"/>
+          <a:stretch>
+            <a:fillRect/>
+          </a:stretch>
+        </p:blipFill>
+        <p:spPr>
+          <a:xfrm>
+            <a:off x="720142" y="527851"/>
+            <a:ext cx="10197517" cy="1468729"/>
+          </a:xfrm>
+          <a:prstGeom prst="rect">
+            <a:avLst/>
+          </a:prstGeom>
+        </p:spPr>
+      </p:pic>
+      <p:pic>
+        <p:nvPicPr>
+          <p:cNvPr id="3" name="Imagem 2">
+            <a:extLst>
+              <a:ext uri="{FF2B5EF4-FFF2-40B4-BE49-F238E27FC236}">
+                <a16:creationId xmlns:a16="http://schemas.microsoft.com/office/drawing/2014/main" id="{0DD742C9-F607-4D9E-81FC-7D45FBECF052}"/>
+              </a:ext>
+            </a:extLst>
+          </p:cNvPr>
+          <p:cNvPicPr>
+            <a:picLocks noChangeAspect="1"/>
+          </p:cNvPicPr>
+          <p:nvPr/>
+        </p:nvPicPr>
+        <p:blipFill>
+          <a:blip r:embed="rId3"/>
+          <a:stretch>
+            <a:fillRect/>
+          </a:stretch>
+        </p:blipFill>
+        <p:spPr>
+          <a:xfrm>
+            <a:off x="796822" y="5763411"/>
+            <a:ext cx="7762875" cy="1133475"/>
+          </a:xfrm>
+          <a:prstGeom prst="rect">
+            <a:avLst/>
+          </a:prstGeom>
+        </p:spPr>
+      </p:pic>
+      <p:pic>
+        <p:nvPicPr>
+          <p:cNvPr id="4" name="Imagem 3">
+            <a:extLst>
+              <a:ext uri="{FF2B5EF4-FFF2-40B4-BE49-F238E27FC236}">
+                <a16:creationId xmlns:a16="http://schemas.microsoft.com/office/drawing/2014/main" id="{3FAAF644-B319-49D7-9EBF-5D91C3406480}"/>
+              </a:ext>
+            </a:extLst>
+          </p:cNvPr>
+          <p:cNvPicPr>
+            <a:picLocks noChangeAspect="1"/>
+          </p:cNvPicPr>
+          <p:nvPr/>
+        </p:nvPicPr>
+        <p:blipFill>
+          <a:blip r:embed="rId4"/>
+          <a:stretch>
+            <a:fillRect/>
+          </a:stretch>
+        </p:blipFill>
+        <p:spPr>
+          <a:xfrm>
+            <a:off x="999033" y="1331054"/>
+            <a:ext cx="8029575" cy="3810000"/>
+          </a:xfrm>
+          <a:prstGeom prst="rect">
+            <a:avLst/>
+          </a:prstGeom>
+        </p:spPr>
+      </p:pic>
+    </p:spTree>
+    <p:extLst>
+      <p:ext uri="{BB962C8B-B14F-4D97-AF65-F5344CB8AC3E}">
+        <p14:creationId xmlns:p14="http://schemas.microsoft.com/office/powerpoint/2010/main" val="283228840"/>
+      </p:ext>
+    </p:extLst>
+  </p:cSld>
+  <p:clrMapOvr>
+    <a:masterClrMapping/>
+  </p:clrMapOvr>
+</p:sld>
+</file>
+
+<file path=ppt/slides/slide27.xml><?xml version="1.0" encoding="utf-8"?>
+<p:sld xmlns:a="http://schemas.openxmlformats.org/drawingml/2006/main" xmlns:r="http://schemas.openxmlformats.org/officeDocument/2006/relationships" xmlns:p="http://schemas.openxmlformats.org/presentationml/2006/main">
+  <p:cSld>
+    <p:spTree>
+      <p:nvGrpSpPr>
+        <p:cNvPr id="1" name=""/>
+        <p:cNvGrpSpPr/>
+        <p:nvPr/>
+      </p:nvGrpSpPr>
+      <p:grpSpPr>
+        <a:xfrm>
+          <a:off x="0" y="0"/>
+          <a:ext cx="0" cy="0"/>
+          <a:chOff x="0" y="0"/>
+          <a:chExt cx="0" cy="0"/>
+        </a:xfrm>
+      </p:grpSpPr>
+      <p:pic>
+        <p:nvPicPr>
+          <p:cNvPr id="2" name="Imagem 1">
+            <a:extLst>
+              <a:ext uri="{FF2B5EF4-FFF2-40B4-BE49-F238E27FC236}">
+                <a16:creationId xmlns:a16="http://schemas.microsoft.com/office/drawing/2014/main" id="{8DF1E6F5-C03E-4899-98A1-7C01E2636533}"/>
+              </a:ext>
+            </a:extLst>
+          </p:cNvPr>
+          <p:cNvPicPr>
+            <a:picLocks noChangeAspect="1"/>
+          </p:cNvPicPr>
+          <p:nvPr/>
+        </p:nvPicPr>
+        <p:blipFill>
+          <a:blip r:embed="rId2"/>
+          <a:stretch>
+            <a:fillRect/>
+          </a:stretch>
+        </p:blipFill>
+        <p:spPr>
+          <a:xfrm>
+            <a:off x="2021747" y="727169"/>
+            <a:ext cx="8704164" cy="5791077"/>
+          </a:xfrm>
+          <a:prstGeom prst="rect">
+            <a:avLst/>
+          </a:prstGeom>
+        </p:spPr>
+      </p:pic>
+    </p:spTree>
+    <p:extLst>
+      <p:ext uri="{BB962C8B-B14F-4D97-AF65-F5344CB8AC3E}">
+        <p14:creationId xmlns:p14="http://schemas.microsoft.com/office/powerpoint/2010/main" val="691213504"/>
+      </p:ext>
+    </p:extLst>
+  </p:cSld>
+  <p:clrMapOvr>
+    <a:masterClrMapping/>
+  </p:clrMapOvr>
+</p:sld>
+</file>
+
+<file path=ppt/slides/slide28.xml><?xml version="1.0" encoding="utf-8"?>
+<p:sld xmlns:a="http://schemas.openxmlformats.org/drawingml/2006/main" xmlns:r="http://schemas.openxmlformats.org/officeDocument/2006/relationships" xmlns:p="http://schemas.openxmlformats.org/presentationml/2006/main">
+  <p:cSld>
+    <p:spTree>
+      <p:nvGrpSpPr>
+        <p:cNvPr id="1" name=""/>
+        <p:cNvGrpSpPr/>
+        <p:nvPr/>
+      </p:nvGrpSpPr>
+      <p:grpSpPr>
+        <a:xfrm>
+          <a:off x="0" y="0"/>
+          <a:ext cx="0" cy="0"/>
+          <a:chOff x="0" y="0"/>
+          <a:chExt cx="0" cy="0"/>
+        </a:xfrm>
+      </p:grpSpPr>
+      <p:sp>
+        <p:nvSpPr>
+          <p:cNvPr id="2" name="Título 1">
+            <a:extLst>
+              <a:ext uri="{FF2B5EF4-FFF2-40B4-BE49-F238E27FC236}">
+                <a16:creationId xmlns:a16="http://schemas.microsoft.com/office/drawing/2014/main" id="{0455C1E2-A087-4D19-B470-CF2F3B4046ED}"/>
+              </a:ext>
+            </a:extLst>
+          </p:cNvPr>
+          <p:cNvSpPr>
+            <a:spLocks noGrp="1"/>
+          </p:cNvSpPr>
+          <p:nvPr>
+            <p:ph type="title"/>
+          </p:nvPr>
+        </p:nvSpPr>
+        <p:spPr/>
+        <p:txBody>
+          <a:bodyPr/>
+          <a:lstStyle/>
+          <a:p>
+            <a:r>
+              <a:rPr lang="pt-BR" dirty="0" err="1"/>
+              <a:t>Stored</a:t>
+            </a:r>
+            <a:r>
+              <a:rPr lang="pt-BR" dirty="0"/>
+              <a:t> Procedure</a:t>
+            </a:r>
+          </a:p>
+        </p:txBody>
+      </p:sp>
+      <p:pic>
+        <p:nvPicPr>
+          <p:cNvPr id="3" name="Imagem 2">
+            <a:extLst>
+              <a:ext uri="{FF2B5EF4-FFF2-40B4-BE49-F238E27FC236}">
+                <a16:creationId xmlns:a16="http://schemas.microsoft.com/office/drawing/2014/main" id="{1ED918D2-6428-4630-945C-61B96B79E196}"/>
+              </a:ext>
+            </a:extLst>
+          </p:cNvPr>
+          <p:cNvPicPr>
+            <a:picLocks noChangeAspect="1"/>
+          </p:cNvPicPr>
+          <p:nvPr/>
+        </p:nvPicPr>
+        <p:blipFill>
+          <a:blip r:embed="rId2"/>
+          <a:stretch>
+            <a:fillRect/>
+          </a:stretch>
+        </p:blipFill>
+        <p:spPr>
+          <a:xfrm>
+            <a:off x="989245" y="1471438"/>
+            <a:ext cx="3849880" cy="2253274"/>
+          </a:xfrm>
+          <a:prstGeom prst="rect">
+            <a:avLst/>
+          </a:prstGeom>
+        </p:spPr>
+      </p:pic>
+      <p:pic>
+        <p:nvPicPr>
+          <p:cNvPr id="4" name="Imagem 3">
+            <a:extLst>
+              <a:ext uri="{FF2B5EF4-FFF2-40B4-BE49-F238E27FC236}">
+                <a16:creationId xmlns:a16="http://schemas.microsoft.com/office/drawing/2014/main" id="{34511B25-4C31-466C-AD02-170874BE0995}"/>
+              </a:ext>
+            </a:extLst>
+          </p:cNvPr>
+          <p:cNvPicPr>
+            <a:picLocks noChangeAspect="1"/>
+          </p:cNvPicPr>
+          <p:nvPr/>
+        </p:nvPicPr>
+        <p:blipFill>
+          <a:blip r:embed="rId3"/>
+          <a:stretch>
+            <a:fillRect/>
+          </a:stretch>
+        </p:blipFill>
+        <p:spPr>
+          <a:xfrm>
+            <a:off x="5147839" y="1190625"/>
+            <a:ext cx="5019618" cy="2547754"/>
+          </a:xfrm>
+          <a:prstGeom prst="rect">
+            <a:avLst/>
+          </a:prstGeom>
+        </p:spPr>
+      </p:pic>
+    </p:spTree>
+    <p:extLst>
+      <p:ext uri="{BB962C8B-B14F-4D97-AF65-F5344CB8AC3E}">
+        <p14:creationId xmlns:p14="http://schemas.microsoft.com/office/powerpoint/2010/main" val="3749781772"/>
+      </p:ext>
+    </p:extLst>
+  </p:cSld>
+  <p:clrMapOvr>
+    <a:masterClrMapping/>
+  </p:clrMapOvr>
+</p:sld>
+</file>
+
+<file path=ppt/slides/slide29.xml><?xml version="1.0" encoding="utf-8"?>
+<p:sld xmlns:a="http://schemas.openxmlformats.org/drawingml/2006/main" xmlns:r="http://schemas.openxmlformats.org/officeDocument/2006/relationships" xmlns:p="http://schemas.openxmlformats.org/presentationml/2006/main">
+  <p:cSld>
+    <p:spTree>
+      <p:nvGrpSpPr>
+        <p:cNvPr id="1" name=""/>
+        <p:cNvGrpSpPr/>
+        <p:nvPr/>
+      </p:nvGrpSpPr>
+      <p:grpSpPr>
+        <a:xfrm>
+          <a:off x="0" y="0"/>
+          <a:ext cx="0" cy="0"/>
+          <a:chOff x="0" y="0"/>
+          <a:chExt cx="0" cy="0"/>
+        </a:xfrm>
+      </p:grpSpPr>
+      <p:pic>
+        <p:nvPicPr>
+          <p:cNvPr id="2" name="Imagem 1">
+            <a:extLst>
+              <a:ext uri="{FF2B5EF4-FFF2-40B4-BE49-F238E27FC236}">
+                <a16:creationId xmlns:a16="http://schemas.microsoft.com/office/drawing/2014/main" id="{54B12342-2681-4C55-B7A1-865D9660F3FB}"/>
+              </a:ext>
+            </a:extLst>
+          </p:cNvPr>
+          <p:cNvPicPr>
+            <a:picLocks noChangeAspect="1"/>
+          </p:cNvPicPr>
+          <p:nvPr/>
+        </p:nvPicPr>
+        <p:blipFill>
+          <a:blip r:embed="rId2"/>
+          <a:stretch>
+            <a:fillRect/>
+          </a:stretch>
+        </p:blipFill>
+        <p:spPr>
+          <a:xfrm>
+            <a:off x="125835" y="473365"/>
+            <a:ext cx="5256056" cy="2169166"/>
+          </a:xfrm>
+          <a:prstGeom prst="rect">
+            <a:avLst/>
+          </a:prstGeom>
+        </p:spPr>
+      </p:pic>
+    </p:spTree>
+    <p:extLst>
+      <p:ext uri="{BB962C8B-B14F-4D97-AF65-F5344CB8AC3E}">
+        <p14:creationId xmlns:p14="http://schemas.microsoft.com/office/powerpoint/2010/main" val="1764663710"/>
+      </p:ext>
+    </p:extLst>
+  </p:cSld>
+  <p:clrMapOvr>
+    <a:masterClrMapping/>
+  </p:clrMapOvr>
+</p:sld>
+</file>
+
 <file path=ppt/slides/slide3.xml><?xml version="1.0" encoding="utf-8"?>
 <p:sld xmlns:a="http://schemas.openxmlformats.org/drawingml/2006/main" xmlns:r="http://schemas.openxmlformats.org/officeDocument/2006/relationships" xmlns:p="http://schemas.openxmlformats.org/presentationml/2006/main">
   <p:cSld>
@@ -4787,6 +6239,716 @@
     <p:extLst>
       <p:ext uri="{BB962C8B-B14F-4D97-AF65-F5344CB8AC3E}">
         <p14:creationId xmlns:p14="http://schemas.microsoft.com/office/powerpoint/2010/main" val="2610408503"/>
+      </p:ext>
+    </p:extLst>
+  </p:cSld>
+  <p:clrMapOvr>
+    <a:masterClrMapping/>
+  </p:clrMapOvr>
+</p:sld>
+</file>
+
+<file path=ppt/slides/slide30.xml><?xml version="1.0" encoding="utf-8"?>
+<p:sld xmlns:a="http://schemas.openxmlformats.org/drawingml/2006/main" xmlns:r="http://schemas.openxmlformats.org/officeDocument/2006/relationships" xmlns:p="http://schemas.openxmlformats.org/presentationml/2006/main">
+  <p:cSld>
+    <p:spTree>
+      <p:nvGrpSpPr>
+        <p:cNvPr id="1" name=""/>
+        <p:cNvGrpSpPr/>
+        <p:nvPr/>
+      </p:nvGrpSpPr>
+      <p:grpSpPr>
+        <a:xfrm>
+          <a:off x="0" y="0"/>
+          <a:ext cx="0" cy="0"/>
+          <a:chOff x="0" y="0"/>
+          <a:chExt cx="0" cy="0"/>
+        </a:xfrm>
+      </p:grpSpPr>
+      <p:pic>
+        <p:nvPicPr>
+          <p:cNvPr id="2" name="Imagem 1">
+            <a:extLst>
+              <a:ext uri="{FF2B5EF4-FFF2-40B4-BE49-F238E27FC236}">
+                <a16:creationId xmlns:a16="http://schemas.microsoft.com/office/drawing/2014/main" id="{6FCDC272-E2F1-482C-85BC-60499E78500E}"/>
+              </a:ext>
+            </a:extLst>
+          </p:cNvPr>
+          <p:cNvPicPr>
+            <a:picLocks noChangeAspect="1"/>
+          </p:cNvPicPr>
+          <p:nvPr/>
+        </p:nvPicPr>
+        <p:blipFill>
+          <a:blip r:embed="rId2"/>
+          <a:stretch>
+            <a:fillRect/>
+          </a:stretch>
+        </p:blipFill>
+        <p:spPr>
+          <a:xfrm>
+            <a:off x="1138674" y="853099"/>
+            <a:ext cx="10077407" cy="4752613"/>
+          </a:xfrm>
+          <a:prstGeom prst="rect">
+            <a:avLst/>
+          </a:prstGeom>
+        </p:spPr>
+      </p:pic>
+    </p:spTree>
+    <p:extLst>
+      <p:ext uri="{BB962C8B-B14F-4D97-AF65-F5344CB8AC3E}">
+        <p14:creationId xmlns:p14="http://schemas.microsoft.com/office/powerpoint/2010/main" val="2875927116"/>
+      </p:ext>
+    </p:extLst>
+  </p:cSld>
+  <p:clrMapOvr>
+    <a:masterClrMapping/>
+  </p:clrMapOvr>
+</p:sld>
+</file>
+
+<file path=ppt/slides/slide31.xml><?xml version="1.0" encoding="utf-8"?>
+<p:sld xmlns:a="http://schemas.openxmlformats.org/drawingml/2006/main" xmlns:r="http://schemas.openxmlformats.org/officeDocument/2006/relationships" xmlns:p="http://schemas.openxmlformats.org/presentationml/2006/main">
+  <p:cSld>
+    <p:spTree>
+      <p:nvGrpSpPr>
+        <p:cNvPr id="1" name=""/>
+        <p:cNvGrpSpPr/>
+        <p:nvPr/>
+      </p:nvGrpSpPr>
+      <p:grpSpPr>
+        <a:xfrm>
+          <a:off x="0" y="0"/>
+          <a:ext cx="0" cy="0"/>
+          <a:chOff x="0" y="0"/>
+          <a:chExt cx="0" cy="0"/>
+        </a:xfrm>
+      </p:grpSpPr>
+      <p:pic>
+        <p:nvPicPr>
+          <p:cNvPr id="2" name="Imagem 1">
+            <a:extLst>
+              <a:ext uri="{FF2B5EF4-FFF2-40B4-BE49-F238E27FC236}">
+                <a16:creationId xmlns:a16="http://schemas.microsoft.com/office/drawing/2014/main" id="{E5DD1E00-229D-445F-BFF1-AC32611EF6BE}"/>
+              </a:ext>
+            </a:extLst>
+          </p:cNvPr>
+          <p:cNvPicPr>
+            <a:picLocks noChangeAspect="1"/>
+          </p:cNvPicPr>
+          <p:nvPr/>
+        </p:nvPicPr>
+        <p:blipFill>
+          <a:blip r:embed="rId2"/>
+          <a:stretch>
+            <a:fillRect/>
+          </a:stretch>
+        </p:blipFill>
+        <p:spPr>
+          <a:xfrm>
+            <a:off x="0" y="188589"/>
+            <a:ext cx="9810009" cy="6480821"/>
+          </a:xfrm>
+          <a:prstGeom prst="rect">
+            <a:avLst/>
+          </a:prstGeom>
+        </p:spPr>
+      </p:pic>
+      <p:sp>
+        <p:nvSpPr>
+          <p:cNvPr id="3" name="CaixaDeTexto 2">
+            <a:extLst>
+              <a:ext uri="{FF2B5EF4-FFF2-40B4-BE49-F238E27FC236}">
+                <a16:creationId xmlns:a16="http://schemas.microsoft.com/office/drawing/2014/main" id="{32A78948-85A7-4199-9ABB-D246B0CA953C}"/>
+              </a:ext>
+            </a:extLst>
+          </p:cNvPr>
+          <p:cNvSpPr txBox="1"/>
+          <p:nvPr/>
+        </p:nvSpPr>
+        <p:spPr>
+          <a:xfrm>
+            <a:off x="8917497" y="494950"/>
+            <a:ext cx="3013902" cy="369332"/>
+          </a:xfrm>
+          <a:prstGeom prst="rect">
+            <a:avLst/>
+          </a:prstGeom>
+          <a:noFill/>
+        </p:spPr>
+        <p:txBody>
+          <a:bodyPr wrap="none" rtlCol="0">
+            <a:spAutoFit/>
+          </a:bodyPr>
+          <a:lstStyle/>
+          <a:p>
+            <a:r>
+              <a:rPr lang="pt-BR" dirty="0"/>
+              <a:t>(</a:t>
+            </a:r>
+            <a:r>
+              <a:rPr lang="pt-BR" b="1" dirty="0"/>
+              <a:t>IN </a:t>
+            </a:r>
+            <a:r>
+              <a:rPr lang="pt-BR" b="1" dirty="0" err="1"/>
+              <a:t>nome_eixo</a:t>
+            </a:r>
+            <a:r>
+              <a:rPr lang="pt-BR" b="1" dirty="0"/>
+              <a:t> VARCHAR(60))</a:t>
+            </a:r>
+          </a:p>
+        </p:txBody>
+      </p:sp>
+      <p:sp>
+        <p:nvSpPr>
+          <p:cNvPr id="4" name="Retângulo 3">
+            <a:extLst>
+              <a:ext uri="{FF2B5EF4-FFF2-40B4-BE49-F238E27FC236}">
+                <a16:creationId xmlns:a16="http://schemas.microsoft.com/office/drawing/2014/main" id="{38ADE437-EB58-46FA-A6A7-8EC253893725}"/>
+              </a:ext>
+            </a:extLst>
+          </p:cNvPr>
+          <p:cNvSpPr/>
+          <p:nvPr/>
+        </p:nvSpPr>
+        <p:spPr>
+          <a:xfrm>
+            <a:off x="5603846" y="816700"/>
+            <a:ext cx="6838506" cy="707886"/>
+          </a:xfrm>
+          <a:prstGeom prst="rect">
+            <a:avLst/>
+          </a:prstGeom>
+          <a:noFill/>
+        </p:spPr>
+        <p:txBody>
+          <a:bodyPr wrap="square" lIns="91440" tIns="45720" rIns="91440" bIns="45720">
+            <a:spAutoFit/>
+          </a:bodyPr>
+          <a:lstStyle/>
+          <a:p>
+            <a:pPr algn="ctr"/>
+            <a:r>
+              <a:rPr lang="pt-BR" sz="4000" b="1" cap="none" spc="0" dirty="0">
+                <a:ln w="13462">
+                  <a:solidFill>
+                    <a:schemeClr val="bg1"/>
+                  </a:solidFill>
+                  <a:prstDash val="solid"/>
+                </a:ln>
+                <a:solidFill>
+                  <a:schemeClr val="tx1">
+                    <a:lumMod val="85000"/>
+                    <a:lumOff val="15000"/>
+                  </a:schemeClr>
+                </a:solidFill>
+                <a:effectLst>
+                  <a:outerShdw dist="38100" dir="2700000" algn="bl" rotWithShape="0">
+                    <a:schemeClr val="accent5"/>
+                  </a:outerShdw>
+                </a:effectLst>
+              </a:rPr>
+              <a:t>Parâmetros ou argumentos</a:t>
+            </a:r>
+          </a:p>
+        </p:txBody>
+      </p:sp>
+    </p:spTree>
+    <p:extLst>
+      <p:ext uri="{BB962C8B-B14F-4D97-AF65-F5344CB8AC3E}">
+        <p14:creationId xmlns:p14="http://schemas.microsoft.com/office/powerpoint/2010/main" val="1832028539"/>
+      </p:ext>
+    </p:extLst>
+  </p:cSld>
+  <p:clrMapOvr>
+    <a:masterClrMapping/>
+  </p:clrMapOvr>
+</p:sld>
+</file>
+
+<file path=ppt/slides/slide32.xml><?xml version="1.0" encoding="utf-8"?>
+<p:sld xmlns:a="http://schemas.openxmlformats.org/drawingml/2006/main" xmlns:r="http://schemas.openxmlformats.org/officeDocument/2006/relationships" xmlns:p="http://schemas.openxmlformats.org/presentationml/2006/main">
+  <p:cSld>
+    <p:spTree>
+      <p:nvGrpSpPr>
+        <p:cNvPr id="1" name=""/>
+        <p:cNvGrpSpPr/>
+        <p:nvPr/>
+      </p:nvGrpSpPr>
+      <p:grpSpPr>
+        <a:xfrm>
+          <a:off x="0" y="0"/>
+          <a:ext cx="0" cy="0"/>
+          <a:chOff x="0" y="0"/>
+          <a:chExt cx="0" cy="0"/>
+        </a:xfrm>
+      </p:grpSpPr>
+      <p:sp>
+        <p:nvSpPr>
+          <p:cNvPr id="2" name="Título 1">
+            <a:extLst>
+              <a:ext uri="{FF2B5EF4-FFF2-40B4-BE49-F238E27FC236}">
+                <a16:creationId xmlns:a16="http://schemas.microsoft.com/office/drawing/2014/main" id="{CDE0F469-E39A-4A28-A74E-5EE407E41AB1}"/>
+              </a:ext>
+            </a:extLst>
+          </p:cNvPr>
+          <p:cNvSpPr>
+            <a:spLocks noGrp="1"/>
+          </p:cNvSpPr>
+          <p:nvPr>
+            <p:ph type="title"/>
+          </p:nvPr>
+        </p:nvSpPr>
+        <p:spPr/>
+        <p:txBody>
+          <a:bodyPr/>
+          <a:lstStyle/>
+          <a:p>
+            <a:r>
+              <a:rPr lang="pt-BR" b="1" dirty="0" err="1">
+                <a:highlight>
+                  <a:srgbClr val="FFFF00"/>
+                </a:highlight>
+              </a:rPr>
+              <a:t>Stored</a:t>
+            </a:r>
+            <a:r>
+              <a:rPr lang="pt-BR" b="1" dirty="0">
+                <a:highlight>
+                  <a:srgbClr val="FFFF00"/>
+                </a:highlight>
+              </a:rPr>
+              <a:t> Procedure </a:t>
+            </a:r>
+            <a:r>
+              <a:rPr lang="pt-BR" dirty="0">
+                <a:highlight>
+                  <a:srgbClr val="FFFF00"/>
+                </a:highlight>
+              </a:rPr>
+              <a:t>ou </a:t>
+            </a:r>
+            <a:r>
+              <a:rPr lang="pt-BR" b="1" dirty="0" err="1">
+                <a:highlight>
+                  <a:srgbClr val="FFFF00"/>
+                </a:highlight>
+              </a:rPr>
+              <a:t>Functions</a:t>
+            </a:r>
+            <a:endParaRPr lang="pt-BR" b="1" dirty="0">
+              <a:highlight>
+                <a:srgbClr val="FFFF00"/>
+              </a:highlight>
+            </a:endParaRPr>
+          </a:p>
+        </p:txBody>
+      </p:sp>
+      <p:sp>
+        <p:nvSpPr>
+          <p:cNvPr id="3" name="Espaço Reservado para Conteúdo 2">
+            <a:extLst>
+              <a:ext uri="{FF2B5EF4-FFF2-40B4-BE49-F238E27FC236}">
+                <a16:creationId xmlns:a16="http://schemas.microsoft.com/office/drawing/2014/main" id="{6107156E-3D2D-4BD5-B796-0CEA7DE1FCA6}"/>
+              </a:ext>
+            </a:extLst>
+          </p:cNvPr>
+          <p:cNvSpPr>
+            <a:spLocks noGrp="1"/>
+          </p:cNvSpPr>
+          <p:nvPr>
+            <p:ph idx="1"/>
+          </p:nvPr>
+        </p:nvSpPr>
+        <p:spPr/>
+        <p:txBody>
+          <a:bodyPr/>
+          <a:lstStyle/>
+          <a:p>
+            <a:r>
+              <a:rPr lang="pt-BR" b="1" dirty="0"/>
+              <a:t>Procedimentos</a:t>
+            </a:r>
+            <a:r>
+              <a:rPr lang="pt-BR" dirty="0"/>
+              <a:t> </a:t>
+            </a:r>
+          </a:p>
+          <a:p>
+            <a:r>
+              <a:rPr lang="pt-BR" dirty="0"/>
+              <a:t>F</a:t>
+            </a:r>
+            <a:r>
+              <a:rPr lang="pt-BR" b="1" dirty="0"/>
+              <a:t>unções</a:t>
+            </a:r>
+          </a:p>
+          <a:p>
+            <a:r>
+              <a:rPr lang="pt-BR" b="1" dirty="0"/>
+              <a:t>Parâmetros</a:t>
+            </a:r>
+          </a:p>
+          <a:p>
+            <a:r>
+              <a:rPr lang="pt-BR" dirty="0"/>
+              <a:t>Variáveis</a:t>
+            </a:r>
+          </a:p>
+          <a:p>
+            <a:r>
+              <a:rPr lang="pt-BR" dirty="0"/>
+              <a:t>Estruturas de Seleção</a:t>
+            </a:r>
+          </a:p>
+          <a:p>
+            <a:r>
+              <a:rPr lang="pt-BR" dirty="0"/>
+              <a:t>Estruturas de Repetição</a:t>
+            </a:r>
+          </a:p>
+          <a:p>
+            <a:r>
+              <a:rPr lang="pt-BR" dirty="0"/>
+              <a:t>Programação Avançada de ETL</a:t>
+            </a:r>
+          </a:p>
+          <a:p>
+            <a:endParaRPr lang="pt-BR" dirty="0"/>
+          </a:p>
+        </p:txBody>
+      </p:sp>
+    </p:spTree>
+    <p:extLst>
+      <p:ext uri="{BB962C8B-B14F-4D97-AF65-F5344CB8AC3E}">
+        <p14:creationId xmlns:p14="http://schemas.microsoft.com/office/powerpoint/2010/main" val="3259169797"/>
+      </p:ext>
+    </p:extLst>
+  </p:cSld>
+  <p:clrMapOvr>
+    <a:masterClrMapping/>
+  </p:clrMapOvr>
+</p:sld>
+</file>
+
+<file path=ppt/slides/slide33.xml><?xml version="1.0" encoding="utf-8"?>
+<p:sld xmlns:a="http://schemas.openxmlformats.org/drawingml/2006/main" xmlns:r="http://schemas.openxmlformats.org/officeDocument/2006/relationships" xmlns:p="http://schemas.openxmlformats.org/presentationml/2006/main">
+  <p:cSld>
+    <p:spTree>
+      <p:nvGrpSpPr>
+        <p:cNvPr id="1" name=""/>
+        <p:cNvGrpSpPr/>
+        <p:nvPr/>
+      </p:nvGrpSpPr>
+      <p:grpSpPr>
+        <a:xfrm>
+          <a:off x="0" y="0"/>
+          <a:ext cx="0" cy="0"/>
+          <a:chOff x="0" y="0"/>
+          <a:chExt cx="0" cy="0"/>
+        </a:xfrm>
+      </p:grpSpPr>
+      <p:sp>
+        <p:nvSpPr>
+          <p:cNvPr id="2" name="Título 1">
+            <a:extLst>
+              <a:ext uri="{FF2B5EF4-FFF2-40B4-BE49-F238E27FC236}">
+                <a16:creationId xmlns:a16="http://schemas.microsoft.com/office/drawing/2014/main" id="{F6DCE591-3077-4836-9C2C-942986042DBC}"/>
+              </a:ext>
+            </a:extLst>
+          </p:cNvPr>
+          <p:cNvSpPr>
+            <a:spLocks noGrp="1"/>
+          </p:cNvSpPr>
+          <p:nvPr>
+            <p:ph type="title"/>
+          </p:nvPr>
+        </p:nvSpPr>
+        <p:spPr/>
+        <p:txBody>
+          <a:bodyPr/>
+          <a:lstStyle/>
+          <a:p>
+            <a:r>
+              <a:rPr lang="pt-BR" dirty="0"/>
+              <a:t>Programação</a:t>
+            </a:r>
+          </a:p>
+        </p:txBody>
+      </p:sp>
+      <p:sp>
+        <p:nvSpPr>
+          <p:cNvPr id="3" name="Espaço Reservado para Conteúdo 2">
+            <a:extLst>
+              <a:ext uri="{FF2B5EF4-FFF2-40B4-BE49-F238E27FC236}">
+                <a16:creationId xmlns:a16="http://schemas.microsoft.com/office/drawing/2014/main" id="{66494375-D98C-4740-B422-AE2A4CC39F1A}"/>
+              </a:ext>
+            </a:extLst>
+          </p:cNvPr>
+          <p:cNvSpPr>
+            <a:spLocks noGrp="1"/>
+          </p:cNvSpPr>
+          <p:nvPr>
+            <p:ph idx="1"/>
+          </p:nvPr>
+        </p:nvSpPr>
+        <p:spPr/>
+        <p:txBody>
+          <a:bodyPr>
+            <a:normAutofit lnSpcReduction="10000"/>
+          </a:bodyPr>
+          <a:lstStyle/>
+          <a:p>
+            <a:r>
+              <a:rPr lang="pt-BR" dirty="0"/>
+              <a:t>Criar variáveis</a:t>
+            </a:r>
+          </a:p>
+          <a:p>
+            <a:r>
+              <a:rPr lang="pt-BR" dirty="0"/>
+              <a:t>Criar estruturas</a:t>
+            </a:r>
+          </a:p>
+          <a:p>
+            <a:pPr lvl="1"/>
+            <a:r>
+              <a:rPr lang="pt-BR" dirty="0"/>
+              <a:t>Estrutura de Seleção</a:t>
+            </a:r>
+          </a:p>
+          <a:p>
+            <a:pPr lvl="2"/>
+            <a:r>
+              <a:rPr lang="pt-BR" dirty="0"/>
+              <a:t>SE (condição) ENTÂO</a:t>
+            </a:r>
+          </a:p>
+          <a:p>
+            <a:pPr lvl="3"/>
+            <a:r>
+              <a:rPr lang="pt-BR" dirty="0"/>
+              <a:t>SE condição for verdadeira</a:t>
+            </a:r>
+          </a:p>
+          <a:p>
+            <a:pPr lvl="2"/>
+            <a:r>
+              <a:rPr lang="pt-BR" dirty="0"/>
+              <a:t>SENAO</a:t>
+            </a:r>
+          </a:p>
+          <a:p>
+            <a:pPr lvl="3"/>
+            <a:r>
+              <a:rPr lang="pt-BR" dirty="0"/>
+              <a:t>Se condição for falsa</a:t>
+            </a:r>
+          </a:p>
+          <a:p>
+            <a:pPr lvl="1"/>
+            <a:r>
+              <a:rPr lang="pt-BR" dirty="0"/>
+              <a:t>Estrutura de Repetição (</a:t>
+            </a:r>
+            <a:r>
+              <a:rPr lang="pt-BR" b="1" dirty="0"/>
+              <a:t>loop</a:t>
+            </a:r>
+            <a:r>
+              <a:rPr lang="pt-BR" dirty="0"/>
+              <a:t> ou looping)</a:t>
+            </a:r>
+          </a:p>
+          <a:p>
+            <a:pPr lvl="2"/>
+            <a:r>
+              <a:rPr lang="pt-BR" dirty="0"/>
+              <a:t>Inicio</a:t>
+            </a:r>
+          </a:p>
+          <a:p>
+            <a:pPr lvl="2"/>
+            <a:r>
+              <a:rPr lang="pt-BR" dirty="0"/>
+              <a:t>   Faça algo até...</a:t>
+            </a:r>
+          </a:p>
+          <a:p>
+            <a:pPr lvl="2"/>
+            <a:r>
+              <a:rPr lang="pt-BR" dirty="0"/>
+              <a:t>   Incrementando </a:t>
+            </a:r>
+          </a:p>
+          <a:p>
+            <a:pPr lvl="2"/>
+            <a:r>
+              <a:rPr lang="pt-BR" dirty="0"/>
+              <a:t>fim</a:t>
+            </a:r>
+          </a:p>
+        </p:txBody>
+      </p:sp>
+    </p:spTree>
+    <p:extLst>
+      <p:ext uri="{BB962C8B-B14F-4D97-AF65-F5344CB8AC3E}">
+        <p14:creationId xmlns:p14="http://schemas.microsoft.com/office/powerpoint/2010/main" val="2548111536"/>
+      </p:ext>
+    </p:extLst>
+  </p:cSld>
+  <p:clrMapOvr>
+    <a:masterClrMapping/>
+  </p:clrMapOvr>
+</p:sld>
+</file>
+
+<file path=ppt/slides/slide34.xml><?xml version="1.0" encoding="utf-8"?>
+<p:sld xmlns:a="http://schemas.openxmlformats.org/drawingml/2006/main" xmlns:r="http://schemas.openxmlformats.org/officeDocument/2006/relationships" xmlns:p="http://schemas.openxmlformats.org/presentationml/2006/main">
+  <p:cSld>
+    <p:spTree>
+      <p:nvGrpSpPr>
+        <p:cNvPr id="1" name=""/>
+        <p:cNvGrpSpPr/>
+        <p:nvPr/>
+      </p:nvGrpSpPr>
+      <p:grpSpPr>
+        <a:xfrm>
+          <a:off x="0" y="0"/>
+          <a:ext cx="0" cy="0"/>
+          <a:chOff x="0" y="0"/>
+          <a:chExt cx="0" cy="0"/>
+        </a:xfrm>
+      </p:grpSpPr>
+      <p:sp>
+        <p:nvSpPr>
+          <p:cNvPr id="2" name="Título 1">
+            <a:extLst>
+              <a:ext uri="{FF2B5EF4-FFF2-40B4-BE49-F238E27FC236}">
+                <a16:creationId xmlns:a16="http://schemas.microsoft.com/office/drawing/2014/main" id="{DEB610CC-BF91-44CE-80CF-7A6C3C4DA836}"/>
+              </a:ext>
+            </a:extLst>
+          </p:cNvPr>
+          <p:cNvSpPr>
+            <a:spLocks noGrp="1"/>
+          </p:cNvSpPr>
+          <p:nvPr>
+            <p:ph type="title"/>
+          </p:nvPr>
+        </p:nvSpPr>
+        <p:spPr/>
+        <p:txBody>
+          <a:bodyPr/>
+          <a:lstStyle/>
+          <a:p>
+            <a:r>
+              <a:rPr lang="pt-BR" dirty="0"/>
+              <a:t>Desafio ETL  </a:t>
+            </a:r>
+            <a:r>
+              <a:rPr lang="pt-BR" b="1" dirty="0"/>
+              <a:t>01</a:t>
+            </a:r>
+          </a:p>
+        </p:txBody>
+      </p:sp>
+      <p:sp>
+        <p:nvSpPr>
+          <p:cNvPr id="3" name="Espaço Reservado para Conteúdo 2">
+            <a:extLst>
+              <a:ext uri="{FF2B5EF4-FFF2-40B4-BE49-F238E27FC236}">
+                <a16:creationId xmlns:a16="http://schemas.microsoft.com/office/drawing/2014/main" id="{CEBC8799-E0AE-4A6D-BD82-C4E0B2CD0EDB}"/>
+              </a:ext>
+            </a:extLst>
+          </p:cNvPr>
+          <p:cNvSpPr>
+            <a:spLocks noGrp="1"/>
+          </p:cNvSpPr>
+          <p:nvPr>
+            <p:ph idx="1"/>
+          </p:nvPr>
+        </p:nvSpPr>
+        <p:spPr/>
+        <p:txBody>
+          <a:bodyPr/>
+          <a:lstStyle/>
+          <a:p>
+            <a:r>
+              <a:rPr lang="pt-BR" b="1" dirty="0">
+                <a:highlight>
+                  <a:srgbClr val="FFFF00"/>
+                </a:highlight>
+              </a:rPr>
+              <a:t>Passo 1 (entendimento)</a:t>
+            </a:r>
+          </a:p>
+          <a:p>
+            <a:pPr lvl="1"/>
+            <a:r>
+              <a:rPr lang="pt-BR" dirty="0"/>
+              <a:t>Qual o problema que eu tenho que resolver.</a:t>
+            </a:r>
+          </a:p>
+          <a:p>
+            <a:pPr lvl="1"/>
+            <a:r>
+              <a:rPr lang="pt-BR" dirty="0"/>
+              <a:t>Entender como funciona o  algoritmo de calcular um número par.</a:t>
+            </a:r>
+          </a:p>
+          <a:p>
+            <a:pPr lvl="2"/>
+            <a:r>
+              <a:rPr lang="pt-BR" dirty="0"/>
+              <a:t>Vou receber um número de um ERP (sistema externo)</a:t>
+            </a:r>
+          </a:p>
+          <a:p>
+            <a:pPr lvl="3"/>
+            <a:r>
+              <a:rPr lang="pt-BR" dirty="0"/>
+              <a:t>O ERP envia o número inteiro</a:t>
+            </a:r>
+          </a:p>
+          <a:p>
+            <a:pPr lvl="3"/>
+            <a:r>
+              <a:rPr lang="pt-BR" dirty="0"/>
+              <a:t>A procedure recebe o número inteiro</a:t>
+            </a:r>
+          </a:p>
+          <a:p>
+            <a:pPr lvl="3"/>
+            <a:r>
+              <a:rPr lang="pt-BR" dirty="0"/>
+              <a:t>A procedure realizar o cálculo de verificação de par e impar</a:t>
+            </a:r>
+          </a:p>
+          <a:p>
+            <a:pPr lvl="3"/>
+            <a:r>
+              <a:rPr lang="pt-BR" dirty="0"/>
+              <a:t>A procedure mostra  a mensagem de o número é par ou impar (inteiro e vai trazer de volta uma </a:t>
+            </a:r>
+            <a:r>
+              <a:rPr lang="pt-BR" dirty="0" err="1"/>
+              <a:t>string</a:t>
+            </a:r>
+            <a:r>
+              <a:rPr lang="pt-BR" dirty="0"/>
+              <a:t>)</a:t>
+            </a:r>
+          </a:p>
+        </p:txBody>
+      </p:sp>
+    </p:spTree>
+    <p:extLst>
+      <p:ext uri="{BB962C8B-B14F-4D97-AF65-F5344CB8AC3E}">
+        <p14:creationId xmlns:p14="http://schemas.microsoft.com/office/powerpoint/2010/main" val="2465162196"/>
       </p:ext>
     </p:extLst>
   </p:cSld>
